--- a/videos/deep-learning/001_transformers_part1/recreated_pptx/slide_045_recreated.pptx
+++ b/videos/deep-learning/001_transformers_part1/recreated_pptx/slide_045_recreated.pptx
@@ -2508,7 +2508,7 @@
         </p:nvSpPr>
         <p:spPr>
           <a:xfrm>
-            <a:off x="10033000" y="1587500"/>
+            <a:off x="9855200" y="1625600"/>
             <a:ext cx="533400" cy="165100"/>
           </a:xfrm>
           <a:prstGeom prst="rect">
@@ -4686,8 +4686,8 @@
         </p:nvSpPr>
         <p:spPr>
           <a:xfrm>
-            <a:off x="7315200" y="1993900"/>
-            <a:ext cx="660400" cy="152400"/>
+            <a:off x="7264400" y="1790700"/>
+            <a:ext cx="533400" cy="165100"/>
           </a:xfrm>
           <a:prstGeom prst="rect">
             <a:avLst/>
